--- a/reports/2026-04/weekly/weekly_report_260420.pptx
+++ b/reports/2026-04/weekly/weekly_report_260420.pptx
@@ -11,6 +11,7 @@
     <p:sldId id="259" r:id="rId10"/>
     <p:sldId id="260" r:id="rId11"/>
     <p:sldId id="261" r:id="rId12"/>
+    <p:sldId id="262" r:id="rId13"/>
   </p:sldIdLst>
   <p:sldSz cx="12188952" cy="6858000" type="screen4x3"/>
   <p:notesSz cx="6858000" cy="9144000"/>
@@ -3292,7 +3293,7 @@
                   <a:srgbClr val="89B4FA"/>
                 </a:solidFill>
               </a:rPr>
-              <a:t>本週完成事項 Overview</a:t>
+              <a:t>研究定位（更正版）</a:t>
             </a:r>
           </a:p>
         </p:txBody>
@@ -3355,12 +3356,12 @@
           <a:lstStyle/>
           <a:p>
             <a:r>
-              <a:rPr sz="2400">
+              <a:rPr sz="2500">
                 <a:solidFill>
                   <a:srgbClr val="F9E2AF"/>
                 </a:solidFill>
               </a:rPr>
-              <a:t>• ① 科赫雪花（Koch Snowflake）接入 Persistent Thread 管線</a:t>
+              <a:t>• 基於 software 實作盡可能快的 producer-consumer 架構</a:t>
             </a:r>
           </a:p>
         </p:txBody>
@@ -3393,7 +3394,7 @@
                   <a:srgbClr val="CDD6F4"/>
                 </a:solidFill>
               </a:rPr>
-              <a:t>    ─ Branching feedback loop：1 條邊 → 4 條子邊，驗證 DAG 任務流</a:t>
+              <a:t>    ─ 重點不是單純模仿 D3D Work Graphs API，而是透過 profiling / metrics 找出瓶頸</a:t>
             </a:r>
           </a:p>
         </p:txBody>
@@ -3406,7 +3407,7 @@
         </p:nvSpPr>
         <p:spPr>
           <a:xfrm>
-            <a:off x="548640" y="2066544"/>
+            <a:off x="822959" y="2066544"/>
             <a:ext cx="10789920" cy="502920"/>
           </a:xfrm>
           <a:prstGeom prst="rect">
@@ -3421,12 +3422,12 @@
           <a:lstStyle/>
           <a:p>
             <a:r>
-              <a:rPr sz="2400">
-                <a:solidFill>
-                  <a:srgbClr val="F9E2AF"/>
+              <a:rPr sz="2000">
+                <a:solidFill>
+                  <a:srgbClr val="CDD6F4"/>
                 </a:solidFill>
               </a:rPr>
-              <a:t>• ② Workgroup-Level 角色重構，消除 Wavefront Divergence</a:t>
+              <a:t>    ─ 每次 optimization 只驗證一個假設，保留 bottleneck 歸因</a:t>
             </a:r>
           </a:p>
         </p:txBody>
@@ -3439,7 +3440,7 @@
         </p:nvSpPr>
         <p:spPr>
           <a:xfrm>
-            <a:off x="822959" y="2505456"/>
+            <a:off x="548640" y="2505456"/>
             <a:ext cx="10789920" cy="502920"/>
           </a:xfrm>
           <a:prstGeom prst="rect">
@@ -3454,12 +3455,12 @@
           <a:lstStyle/>
           <a:p>
             <a:r>
-              <a:rPr sz="2000">
-                <a:solidFill>
-                  <a:srgbClr val="CDD6F4"/>
+              <a:rPr sz="2500">
+                <a:solidFill>
+                  <a:srgbClr val="A6E3A1"/>
                 </a:solidFill>
               </a:rPr>
-              <a:t>    ─ 角色由 thread-level 改為 workgroup-level，Dispatch 縮為 8 WG</a:t>
+              <a:t>• 意義：讓 MTK 預先知道 mobile producer-consumer 會卡在哪裡</a:t>
             </a:r>
           </a:p>
         </p:txBody>
@@ -3472,7 +3473,7 @@
         </p:nvSpPr>
         <p:spPr>
           <a:xfrm>
-            <a:off x="548640" y="2944368"/>
+            <a:off x="822959" y="2944368"/>
             <a:ext cx="10789920" cy="502920"/>
           </a:xfrm>
           <a:prstGeom prst="rect">
@@ -3487,12 +3488,12 @@
           <a:lstStyle/>
           <a:p>
             <a:r>
-              <a:rPr sz="2400">
-                <a:solidFill>
-                  <a:srgbClr val="F9E2AF"/>
+              <a:rPr sz="2000">
+                <a:solidFill>
+                  <a:srgbClr val="CDD6F4"/>
                 </a:solidFill>
               </a:rPr>
-              <a:t>• ③ 修復三個跨 CU 記憶體可見性 Bug</a:t>
+              <a:t>    ─ 可能瓶頸：atomic contention、global memory traffic、queue pressure、role imbalance、memory visibility、spin-wait</a:t>
             </a:r>
           </a:p>
         </p:txBody>
@@ -3522,10 +3523,10 @@
             <a:r>
               <a:rPr sz="2000">
                 <a:solidFill>
-                  <a:srgbClr val="A6E3A1"/>
+                  <a:srgbClr val="CDD6F4"/>
                 </a:solidFill>
               </a:rPr>
-              <a:t>    ─ 最終驗證：精確產生 768 條邊 / 1536 頂點，無垃圾資料</a:t>
+              <a:t>    ─ 產出：提供 runtime、driver、hardware 可採用的優化方向</a:t>
             </a:r>
           </a:p>
         </p:txBody>
@@ -3585,7 +3586,7 @@
                   <a:srgbClr val="89B4FA"/>
                 </a:solidFill>
               </a:rPr>
-              <a:t>① Koch Snowflake — Branching Feedback Loop</a:t>
+              <a:t>本週完成事項 Overview</a:t>
             </a:r>
           </a:p>
         </p:txBody>
@@ -3648,12 +3649,12 @@
           <a:lstStyle/>
           <a:p>
             <a:r>
-              <a:rPr sz="2200">
-                <a:solidFill>
-                  <a:srgbClr val="CDD6F4"/>
+              <a:rPr sz="2400">
+                <a:solidFill>
+                  <a:srgbClr val="F9E2AF"/>
                 </a:solidFill>
               </a:rPr>
-              <a:t>• 任務定義：P1→P2 細分為 4 條子邊（+60° 旋轉），MAX_DEPTH=4</a:t>
+              <a:t>• ① 科赫雪花（Koch Snowflake）接入 Persistent Thread 管線</a:t>
             </a:r>
           </a:p>
         </p:txBody>
@@ -3683,10 +3684,10 @@
             <a:r>
               <a:rPr sz="2000">
                 <a:solidFill>
-                  <a:srgbClr val="A6E3A1"/>
+                  <a:srgbClr val="CDD6F4"/>
                 </a:solidFill>
               </a:rPr>
-              <a:t>    ─ 3 條初始邊 × 4⁴ 遞迴 = 768 條最終邊，1536 個頂點</a:t>
+              <a:t>    ─ Branching feedback loop：1 條邊 → 4 條子邊，驗證 DAG 任務流</a:t>
             </a:r>
           </a:p>
         </p:txBody>
@@ -3714,12 +3715,12 @@
           <a:lstStyle/>
           <a:p>
             <a:r>
-              <a:rPr sz="2200">
-                <a:solidFill>
-                  <a:srgbClr val="CDD6F4"/>
+              <a:rPr sz="2400">
+                <a:solidFill>
+                  <a:srgbClr val="F9E2AF"/>
                 </a:solidFill>
               </a:rPr>
-              <a:t>• 三節點拓撲（含 Feedback Loop）</a:t>
+              <a:t>• ② Workgroup-Level 角色重構，消除 Wavefront Divergence</a:t>
             </a:r>
           </a:p>
         </p:txBody>
@@ -3747,12 +3748,12 @@
           <a:lstStyle/>
           <a:p>
             <a:r>
-              <a:rPr sz="1900">
-                <a:solidFill>
-                  <a:srgbClr val="F9E2AF"/>
+              <a:rPr sz="2000">
+                <a:solidFill>
+                  <a:srgbClr val="CDD6F4"/>
                 </a:solidFill>
               </a:rPr>
-              <a:t>    ─ Node A  →  Q1  →  Node B</a:t>
+              <a:t>    ─ 角色由 thread-level 改為 workgroup-level，Dispatch 縮為 8 WG</a:t>
             </a:r>
           </a:p>
         </p:txBody>
@@ -3765,7 +3766,7 @@
         </p:nvSpPr>
         <p:spPr>
           <a:xfrm>
-            <a:off x="1097280" y="2944368"/>
+            <a:off x="548640" y="2944368"/>
             <a:ext cx="10789920" cy="502920"/>
           </a:xfrm>
           <a:prstGeom prst="rect">
@@ -3780,12 +3781,12 @@
           <a:lstStyle/>
           <a:p>
             <a:r>
-              <a:rPr sz="1800">
-                <a:solidFill>
-                  <a:srgbClr val="CDD6F4"/>
+              <a:rPr sz="2400">
+                <a:solidFill>
+                  <a:srgbClr val="F9E2AF"/>
                 </a:solidFill>
               </a:rPr>
-              <a:t>      ─ depth &lt; 4 → 推回 Q1（branching × 4）</a:t>
+              <a:t>• ③ 修復三個跨 CU 記憶體可見性 Bug</a:t>
             </a:r>
           </a:p>
         </p:txBody>
@@ -3798,7 +3799,7 @@
         </p:nvSpPr>
         <p:spPr>
           <a:xfrm>
-            <a:off x="1097280" y="3383280"/>
+            <a:off x="822959" y="3383280"/>
             <a:ext cx="10789920" cy="502920"/>
           </a:xfrm>
           <a:prstGeom prst="rect">
@@ -3813,111 +3814,12 @@
           <a:lstStyle/>
           <a:p>
             <a:r>
-              <a:rPr sz="1800">
-                <a:solidFill>
-                  <a:srgbClr val="CDD6F4"/>
+              <a:rPr sz="2000">
+                <a:solidFill>
+                  <a:srgbClr val="A6E3A1"/>
                 </a:solidFill>
               </a:rPr>
-              <a:t>      ─ depth == 4 → 轉發 Q2 → Node C → Output Buffer</a:t>
-            </a:r>
-          </a:p>
-        </p:txBody>
-      </p:sp>
-      <p:sp>
-        <p:nvSpPr>
-          <p:cNvPr id="10" name="TextBox 9"/>
-          <p:cNvSpPr txBox="1"/>
-          <p:nvPr/>
-        </p:nvSpPr>
-        <p:spPr>
-          <a:xfrm>
-            <a:off x="548640" y="3822192"/>
-            <a:ext cx="10789920" cy="502920"/>
-          </a:xfrm>
-          <a:prstGeom prst="rect">
-            <a:avLst/>
-          </a:prstGeom>
-          <a:noFill/>
-        </p:spPr>
-        <p:txBody>
-          <a:bodyPr wrap="square">
-            <a:spAutoFit/>
-          </a:bodyPr>
-          <a:lstStyle/>
-          <a:p>
-            <a:r>
-              <a:rPr sz="2200">
-                <a:solidFill>
-                  <a:srgbClr val="CDD6F4"/>
-                </a:solidFill>
-              </a:rPr>
-              <a:t>• 資料結構擴充</a:t>
-            </a:r>
-          </a:p>
-        </p:txBody>
-      </p:sp>
-      <p:sp>
-        <p:nvSpPr>
-          <p:cNvPr id="11" name="TextBox 10"/>
-          <p:cNvSpPr txBox="1"/>
-          <p:nvPr/>
-        </p:nvSpPr>
-        <p:spPr>
-          <a:xfrm>
-            <a:off x="822959" y="4261104"/>
-            <a:ext cx="10789920" cy="502920"/>
-          </a:xfrm>
-          <a:prstGeom prst="rect">
-            <a:avLst/>
-          </a:prstGeom>
-          <a:noFill/>
-        </p:spPr>
-        <p:txBody>
-          <a:bodyPr wrap="square">
-            <a:spAutoFit/>
-          </a:bodyPr>
-          <a:lstStyle/>
-          <a:p>
-            <a:r>
-              <a:rPr sz="2000">
-                <a:solidFill>
-                  <a:srgbClr val="CDD6F4"/>
-                </a:solidFill>
-              </a:rPr>
-              <a:t>    ─ payload[6]：坐標 + depth + per-slot ready flag</a:t>
-            </a:r>
-          </a:p>
-        </p:txBody>
-      </p:sp>
-      <p:sp>
-        <p:nvSpPr>
-          <p:cNvPr id="12" name="TextBox 11"/>
-          <p:cNvSpPr txBox="1"/>
-          <p:nvPr/>
-        </p:nvSpPr>
-        <p:spPr>
-          <a:xfrm>
-            <a:off x="822959" y="4700016"/>
-            <a:ext cx="10789920" cy="502920"/>
-          </a:xfrm>
-          <a:prstGeom prst="rect">
-            <a:avLst/>
-          </a:prstGeom>
-          <a:noFill/>
-        </p:spPr>
-        <p:txBody>
-          <a:bodyPr wrap="square">
-            <a:spAutoFit/>
-          </a:bodyPr>
-          <a:lstStyle/>
-          <a:p>
-            <a:r>
-              <a:rPr sz="2000">
-                <a:solidFill>
-                  <a:srgbClr val="CDD6F4"/>
-                </a:solidFill>
-              </a:rPr>
-              <a:t>    ─ 新增第 4 個 SSBO：output vertex buffer（Line List）</a:t>
+              <a:t>    ─ 最終驗證：精確產生 768 條邊 / 1536 頂點，無垃圾資料</a:t>
             </a:r>
           </a:p>
         </p:txBody>
@@ -3977,7 +3879,7 @@
                   <a:srgbClr val="89B4FA"/>
                 </a:solidFill>
               </a:rPr>
-              <a:t>② Workgroup-Level 角色重構</a:t>
+              <a:t>① Koch Snowflake — Branching Feedback Loop</a:t>
             </a:r>
           </a:p>
         </p:txBody>
@@ -4042,10 +3944,10 @@
             <a:r>
               <a:rPr sz="2200">
                 <a:solidFill>
-                  <a:srgbClr val="F38BA8"/>
+                  <a:srgbClr val="CDD6F4"/>
                 </a:solidFill>
               </a:rPr>
-              <a:t>• 原設計問題：gId % 32 → 同一 wavefront 走 3 條不同分支</a:t>
+              <a:t>• 任務定義：P1→P2 細分為 4 條子邊（+60° 旋轉），MAX_DEPTH=4</a:t>
             </a:r>
           </a:p>
         </p:txBody>
@@ -4075,10 +3977,10 @@
             <a:r>
               <a:rPr sz="2000">
                 <a:solidFill>
-                  <a:srgbClr val="CDD6F4"/>
+                  <a:srgbClr val="A6E3A1"/>
                 </a:solidFill>
               </a:rPr>
-              <a:t>    ─ RDNA3 wave32 = 32 threads，GPU 必須依序執行每條分支並 mask 其他 lane</a:t>
+              <a:t>    ─ 3 條初始邊 × 4⁴ 遞迴 = 768 條最終邊，1536 個頂點</a:t>
             </a:r>
           </a:p>
         </p:txBody>
@@ -4108,10 +4010,10 @@
             <a:r>
               <a:rPr sz="2200">
                 <a:solidFill>
-                  <a:srgbClr val="A6E3A1"/>
+                  <a:srgbClr val="CDD6F4"/>
                 </a:solidFill>
               </a:rPr>
-              <a:t>• 重構方案：角色改由 gl_WorkGroupID.x 決定</a:t>
+              <a:t>• 三節點拓撲（含 Feedback Loop）</a:t>
             </a:r>
           </a:p>
         </p:txBody>
@@ -4139,12 +4041,12 @@
           <a:lstStyle/>
           <a:p>
             <a:r>
-              <a:rPr sz="2000">
-                <a:solidFill>
-                  <a:srgbClr val="CDD6F4"/>
+              <a:rPr sz="1900">
+                <a:solidFill>
+                  <a:srgbClr val="F9E2AF"/>
                 </a:solidFill>
               </a:rPr>
-              <a:t>    ─ WG 0–5：Node B（Subdivider），WG 0 兼任初始播種</a:t>
+              <a:t>    ─ Node A  →  Q1  →  Node B</a:t>
             </a:r>
           </a:p>
         </p:txBody>
@@ -4157,7 +4059,7 @@
         </p:nvSpPr>
         <p:spPr>
           <a:xfrm>
-            <a:off x="822959" y="2944368"/>
+            <a:off x="1097280" y="2944368"/>
             <a:ext cx="10789920" cy="502920"/>
           </a:xfrm>
           <a:prstGeom prst="rect">
@@ -4172,12 +4074,12 @@
           <a:lstStyle/>
           <a:p>
             <a:r>
-              <a:rPr sz="2000">
+              <a:rPr sz="1800">
                 <a:solidFill>
                   <a:srgbClr val="CDD6F4"/>
                 </a:solidFill>
               </a:rPr>
-              <a:t>    ─ WG 6–7：Node C（Writer）</a:t>
+              <a:t>      ─ depth &lt; 4 → 推回 Q1（branching × 4）</a:t>
             </a:r>
           </a:p>
         </p:txBody>
@@ -4190,7 +4092,7 @@
         </p:nvSpPr>
         <p:spPr>
           <a:xfrm>
-            <a:off x="822959" y="3383280"/>
+            <a:off x="1097280" y="3383280"/>
             <a:ext cx="10789920" cy="502920"/>
           </a:xfrm>
           <a:prstGeom prst="rect">
@@ -4205,12 +4107,12 @@
           <a:lstStyle/>
           <a:p>
             <a:r>
-              <a:rPr sz="2000">
+              <a:rPr sz="1800">
                 <a:solidFill>
                   <a:srgbClr val="CDD6F4"/>
                 </a:solidFill>
               </a:rPr>
-              <a:t>    ─ Dispatch (32,1,1) → (8,1,1)，同一 workgroup 內所有 thread 做相同工作</a:t>
+              <a:t>      ─ depth == 4 → 轉發 Q2 → Node C → Output Buffer</a:t>
             </a:r>
           </a:p>
         </p:txBody>
@@ -4243,7 +4145,73 @@
                   <a:srgbClr val="CDD6F4"/>
                 </a:solidFill>
               </a:rPr>
-              <a:t>• 新增 specialization constant NODE_C_START（constant_id=2）</a:t>
+              <a:t>• 資料結構擴充</a:t>
+            </a:r>
+          </a:p>
+        </p:txBody>
+      </p:sp>
+      <p:sp>
+        <p:nvSpPr>
+          <p:cNvPr id="11" name="TextBox 10"/>
+          <p:cNvSpPr txBox="1"/>
+          <p:nvPr/>
+        </p:nvSpPr>
+        <p:spPr>
+          <a:xfrm>
+            <a:off x="822959" y="4261104"/>
+            <a:ext cx="10789920" cy="502920"/>
+          </a:xfrm>
+          <a:prstGeom prst="rect">
+            <a:avLst/>
+          </a:prstGeom>
+          <a:noFill/>
+        </p:spPr>
+        <p:txBody>
+          <a:bodyPr wrap="square">
+            <a:spAutoFit/>
+          </a:bodyPr>
+          <a:lstStyle/>
+          <a:p>
+            <a:r>
+              <a:rPr sz="2000">
+                <a:solidFill>
+                  <a:srgbClr val="CDD6F4"/>
+                </a:solidFill>
+              </a:rPr>
+              <a:t>    ─ payload[6]：坐標 + depth + per-slot ready flag</a:t>
+            </a:r>
+          </a:p>
+        </p:txBody>
+      </p:sp>
+      <p:sp>
+        <p:nvSpPr>
+          <p:cNvPr id="12" name="TextBox 11"/>
+          <p:cNvSpPr txBox="1"/>
+          <p:nvPr/>
+        </p:nvSpPr>
+        <p:spPr>
+          <a:xfrm>
+            <a:off x="822959" y="4700016"/>
+            <a:ext cx="10789920" cy="502920"/>
+          </a:xfrm>
+          <a:prstGeom prst="rect">
+            <a:avLst/>
+          </a:prstGeom>
+          <a:noFill/>
+        </p:spPr>
+        <p:txBody>
+          <a:bodyPr wrap="square">
+            <a:spAutoFit/>
+          </a:bodyPr>
+          <a:lstStyle/>
+          <a:p>
+            <a:r>
+              <a:rPr sz="2000">
+                <a:solidFill>
+                  <a:srgbClr val="CDD6F4"/>
+                </a:solidFill>
+              </a:rPr>
+              <a:t>    ─ 新增第 4 個 SSBO：output vertex buffer（Line List）</a:t>
             </a:r>
           </a:p>
         </p:txBody>
@@ -4303,7 +4271,7 @@
                   <a:srgbClr val="89B4FA"/>
                 </a:solidFill>
               </a:rPr>
-              <a:t>③ 三個跨 CU 記憶體可見性 Bug</a:t>
+              <a:t>② Workgroup-Level 角色重構</a:t>
             </a:r>
           </a:p>
         </p:txBody>
@@ -4371,7 +4339,7 @@
                   <a:srgbClr val="F38BA8"/>
                 </a:solidFill>
               </a:rPr>
-              <a:t>• Bug 1：缺少 coherent → Node C 完全無法消費 Q2</a:t>
+              <a:t>• 原設計問題：gId % 32 → 同一 wavefront 走 3 條不同分支</a:t>
             </a:r>
           </a:p>
         </p:txBody>
@@ -4399,12 +4367,12 @@
           <a:lstStyle/>
           <a:p>
             <a:r>
-              <a:rPr sz="1900">
+              <a:rPr sz="2000">
                 <a:solidFill>
                   <a:srgbClr val="CDD6F4"/>
                 </a:solidFill>
               </a:rPr>
-              <a:t>    ─ 非原子讀取從 L0/L1 讀到 stale 值；修復：所有 SSBO 加 coherent</a:t>
+              <a:t>    ─ RDNA3 wave32 = 32 threads，GPU 必須依序執行每條分支並 mask 其他 lane</a:t>
             </a:r>
           </a:p>
         </p:txBody>
@@ -4434,10 +4402,10 @@
             <a:r>
               <a:rPr sz="2200">
                 <a:solidFill>
-                  <a:srgbClr val="F38BA8"/>
+                  <a:srgbClr val="A6E3A1"/>
                 </a:solidFill>
               </a:rPr>
-              <a:t>• Bug 2：Count 先於 Data → 多 192 條邊 + 垃圾頂點</a:t>
+              <a:t>• 重構方案：角色改由 gl_WorkGroupID.x 決定</a:t>
             </a:r>
           </a:p>
         </p:txBody>
@@ -4465,12 +4433,12 @@
           <a:lstStyle/>
           <a:p>
             <a:r>
-              <a:rPr sz="1900">
+              <a:rPr sz="2000">
                 <a:solidFill>
                   <a:srgbClr val="CDD6F4"/>
                 </a:solidFill>
               </a:rPr>
-              <a:t>    ─ Consumer 在 producer 寫完前已讀取 slot；修復：payload[5] per-slot ready flag</a:t>
+              <a:t>    ─ WG 0–5：Node B（Subdivider），WG 0 兼任初始播種</a:t>
             </a:r>
           </a:p>
         </p:txBody>
@@ -4483,7 +4451,7 @@
         </p:nvSpPr>
         <p:spPr>
           <a:xfrm>
-            <a:off x="548640" y="2944368"/>
+            <a:off x="822959" y="2944368"/>
             <a:ext cx="10789920" cy="502920"/>
           </a:xfrm>
           <a:prstGeom prst="rect">
@@ -4498,12 +4466,12 @@
           <a:lstStyle/>
           <a:p>
             <a:r>
-              <a:rPr sz="2200">
-                <a:solidFill>
-                  <a:srgbClr val="F38BA8"/>
+              <a:rPr sz="2000">
+                <a:solidFill>
+                  <a:srgbClr val="CDD6F4"/>
                 </a:solidFill>
               </a:rPr>
-              <a:t>• Bug 3：Plain store 不可靠 → 257 個任務「消失」</a:t>
+              <a:t>    ─ WG 6–7：Node C（Writer）</a:t>
             </a:r>
           </a:p>
         </p:txBody>
@@ -4531,12 +4499,12 @@
           <a:lstStyle/>
           <a:p>
             <a:r>
-              <a:rPr sz="1900">
+              <a:rPr sz="2000">
                 <a:solidFill>
                   <a:srgbClr val="CDD6F4"/>
                 </a:solidFill>
               </a:rPr>
-              <a:t>    ─ Plain store 停在 write-combining buffer；修復：atomicExchange / atomicCompSwap</a:t>
+              <a:t>    ─ Dispatch (32,1,1) → (8,1,1)，同一 workgroup 內所有 thread 做相同工作</a:t>
             </a:r>
           </a:p>
         </p:txBody>
@@ -4564,12 +4532,12 @@
           <a:lstStyle/>
           <a:p>
             <a:r>
-              <a:rPr sz="2100">
-                <a:solidFill>
-                  <a:srgbClr val="F9E2AF"/>
+              <a:rPr sz="2200">
+                <a:solidFill>
+                  <a:srgbClr val="CDD6F4"/>
                 </a:solidFill>
               </a:rPr>
-              <a:t>• 結論：跨 CU 通訊中，coherent + plain store 不夠；所有共享狀態必須原子操作</a:t>
+              <a:t>• 新增 specialization constant NODE_C_START（constant_id=2）</a:t>
             </a:r>
           </a:p>
         </p:txBody>
@@ -4629,7 +4597,7 @@
                   <a:srgbClr val="89B4FA"/>
                 </a:solidFill>
               </a:rPr>
-              <a:t>結果與下週計畫</a:t>
+              <a:t>③ 三個跨 CU 記憶體可見性 Bug</a:t>
             </a:r>
           </a:p>
         </p:txBody>
@@ -4692,12 +4660,12 @@
           <a:lstStyle/>
           <a:p>
             <a:r>
-              <a:rPr sz="2500">
-                <a:solidFill>
-                  <a:srgbClr val="A6E3A1"/>
+              <a:rPr sz="2200">
+                <a:solidFill>
+                  <a:srgbClr val="F38BA8"/>
                 </a:solidFill>
               </a:rPr>
-              <a:t>• 本週驗證結果</a:t>
+              <a:t>• Bug 1：缺少 coherent → Node C 完全無法消費 Q2</a:t>
             </a:r>
           </a:p>
         </p:txBody>
@@ -4725,12 +4693,12 @@
           <a:lstStyle/>
           <a:p>
             <a:r>
-              <a:rPr sz="2200">
+              <a:rPr sz="1900">
                 <a:solidFill>
                   <a:srgbClr val="CDD6F4"/>
                 </a:solidFill>
               </a:rPr>
-              <a:t>    ─ 768 邊 / 1536 頂點精確產生，Q1/Q2 正確歸零</a:t>
+              <a:t>    ─ 非原子讀取從 L0/L1 讀到 stale 值；修復：所有 SSBO 加 coherent</a:t>
             </a:r>
           </a:p>
         </p:txBody>
@@ -4743,7 +4711,7 @@
         </p:nvSpPr>
         <p:spPr>
           <a:xfrm>
-            <a:off x="822959" y="2066544"/>
+            <a:off x="548640" y="2066544"/>
             <a:ext cx="10789920" cy="502920"/>
           </a:xfrm>
           <a:prstGeom prst="rect">
@@ -4758,12 +4726,12 @@
           <a:lstStyle/>
           <a:p>
             <a:r>
-              <a:rPr sz="2000">
-                <a:solidFill>
-                  <a:srgbClr val="CDD6F4"/>
+              <a:rPr sz="2200">
+                <a:solidFill>
+                  <a:srgbClr val="F38BA8"/>
                 </a:solidFill>
               </a:rPr>
-              <a:t>    ─ AMD RX 7900 XTX，耗時 ~2.76s（含 CPU 10ms polling 開銷）</a:t>
+              <a:t>• Bug 2：Count 先於 Data → 多 192 條邊 + 垃圾頂點</a:t>
             </a:r>
           </a:p>
         </p:txBody>
@@ -4776,7 +4744,7 @@
         </p:nvSpPr>
         <p:spPr>
           <a:xfrm>
-            <a:off x="548640" y="2505456"/>
+            <a:off x="822959" y="2505456"/>
             <a:ext cx="10789920" cy="502920"/>
           </a:xfrm>
           <a:prstGeom prst="rect">
@@ -4791,12 +4759,12 @@
           <a:lstStyle/>
           <a:p>
             <a:r>
-              <a:rPr sz="2500">
-                <a:solidFill>
-                  <a:srgbClr val="A6E3A1"/>
+              <a:rPr sz="1900">
+                <a:solidFill>
+                  <a:srgbClr val="CDD6F4"/>
                 </a:solidFill>
               </a:rPr>
-              <a:t>• 下週計畫</a:t>
+              <a:t>    ─ Consumer 在 producer 寫完前已讀取 slot；修復：payload[5] per-slot ready flag</a:t>
             </a:r>
           </a:p>
         </p:txBody>
@@ -4809,7 +4777,7 @@
         </p:nvSpPr>
         <p:spPr>
           <a:xfrm>
-            <a:off x="822959" y="2944368"/>
+            <a:off x="548640" y="2944368"/>
             <a:ext cx="10789920" cy="502920"/>
           </a:xfrm>
           <a:prstGeom prst="rect">
@@ -4826,10 +4794,10 @@
             <a:r>
               <a:rPr sz="2200">
                 <a:solidFill>
-                  <a:srgbClr val="CDD6F4"/>
+                  <a:srgbClr val="F38BA8"/>
                 </a:solidFill>
               </a:rPr>
-              <a:t>    ─ 渲染管線：output vertex buffer → VK_PRIMITIVE_TOPOLOGY_LINE_LIST 顯示</a:t>
+              <a:t>• Bug 3：Plain store 不可靠 → 257 個任務「消失」</a:t>
             </a:r>
           </a:p>
         </p:txBody>
@@ -4857,12 +4825,12 @@
           <a:lstStyle/>
           <a:p>
             <a:r>
-              <a:rPr sz="2200">
+              <a:rPr sz="1900">
                 <a:solidFill>
                   <a:srgbClr val="CDD6F4"/>
                 </a:solidFill>
               </a:rPr>
-              <a:t>    ─ 性能量測：vkCmdWriteTimestamp 量化 GPU 純計算時間 + CAS 失敗率</a:t>
+              <a:t>    ─ Plain store 停在 write-combining buffer；修復：atomicExchange / atomicCompSwap</a:t>
             </a:r>
           </a:p>
         </p:txBody>
@@ -4875,7 +4843,7 @@
         </p:nvSpPr>
         <p:spPr>
           <a:xfrm>
-            <a:off x="822959" y="3822192"/>
+            <a:off x="548640" y="3822192"/>
             <a:ext cx="10789920" cy="502920"/>
           </a:xfrm>
           <a:prstGeom prst="rect">
@@ -4890,12 +4858,338 @@
           <a:lstStyle/>
           <a:p>
             <a:r>
+              <a:rPr sz="2100">
+                <a:solidFill>
+                  <a:srgbClr val="F9E2AF"/>
+                </a:solidFill>
+              </a:rPr>
+              <a:t>• 結論：跨 CU 通訊中，coherent + plain store 不夠；所有共享狀態必須原子操作</a:t>
+            </a:r>
+          </a:p>
+        </p:txBody>
+      </p:sp>
+    </p:spTree>
+  </p:cSld>
+  <p:clrMapOvr>
+    <a:masterClrMapping/>
+  </p:clrMapOvr>
+</p:sld>
+</file>
+
+<file path=ppt/slides/slide7.xml><?xml version="1.0" encoding="utf-8"?>
+<p:sld xmlns:a="http://schemas.openxmlformats.org/drawingml/2006/main" xmlns:p="http://schemas.openxmlformats.org/presentationml/2006/main" xmlns:r="http://schemas.openxmlformats.org/officeDocument/2006/relationships">
+  <p:cSld>
+    <p:bg>
+      <p:bgPr>
+        <a:solidFill>
+          <a:srgbClr val="1E1E2E"/>
+        </a:solidFill>
+        <a:effectLst/>
+      </p:bgPr>
+    </p:bg>
+    <p:spTree>
+      <p:nvGrpSpPr>
+        <p:cNvPr id="1" name=""/>
+        <p:cNvGrpSpPr/>
+        <p:nvPr/>
+      </p:nvGrpSpPr>
+      <p:grpSpPr/>
+      <p:sp>
+        <p:nvSpPr>
+          <p:cNvPr id="2" name="TextBox 1"/>
+          <p:cNvSpPr txBox="1"/>
+          <p:nvPr/>
+        </p:nvSpPr>
+        <p:spPr>
+          <a:xfrm>
+            <a:off x="457200" y="274320"/>
+            <a:ext cx="11247120" cy="731520"/>
+          </a:xfrm>
+          <a:prstGeom prst="rect">
+            <a:avLst/>
+          </a:prstGeom>
+          <a:noFill/>
+        </p:spPr>
+        <p:txBody>
+          <a:bodyPr wrap="square">
+            <a:spAutoFit/>
+          </a:bodyPr>
+          <a:lstStyle/>
+          <a:p>
+            <a:pPr algn="l"/>
+            <a:r>
+              <a:rPr sz="3200" b="1" i="0">
+                <a:solidFill>
+                  <a:srgbClr val="89B4FA"/>
+                </a:solidFill>
+              </a:rPr>
+              <a:t>結果與下週計畫</a:t>
+            </a:r>
+          </a:p>
+        </p:txBody>
+      </p:sp>
+      <p:cxnSp>
+        <p:nvCxnSpPr>
+          <p:cNvPr id="3" name="Connector 2"/>
+          <p:cNvCxnSpPr/>
+          <p:nvPr/>
+        </p:nvCxnSpPr>
+        <p:spPr>
+          <a:xfrm>
+            <a:off x="457200" y="1051560"/>
+            <a:ext cx="11274552" cy="0"/>
+          </a:xfrm>
+          <a:prstGeom prst="line">
+            <a:avLst/>
+          </a:prstGeom>
+          <a:ln w="19050">
+            <a:solidFill>
+              <a:srgbClr val="89B4FA"/>
+            </a:solidFill>
+          </a:ln>
+        </p:spPr>
+        <p:style>
+          <a:lnRef idx="2">
+            <a:schemeClr val="accent1"/>
+          </a:lnRef>
+          <a:fillRef idx="0">
+            <a:schemeClr val="accent1"/>
+          </a:fillRef>
+          <a:effectRef idx="1">
+            <a:schemeClr val="accent1"/>
+          </a:effectRef>
+          <a:fontRef idx="minor">
+            <a:schemeClr val="tx1"/>
+          </a:fontRef>
+        </p:style>
+      </p:cxnSp>
+      <p:sp>
+        <p:nvSpPr>
+          <p:cNvPr id="4" name="TextBox 3"/>
+          <p:cNvSpPr txBox="1"/>
+          <p:nvPr/>
+        </p:nvSpPr>
+        <p:spPr>
+          <a:xfrm>
+            <a:off x="548640" y="1188720"/>
+            <a:ext cx="10789920" cy="502920"/>
+          </a:xfrm>
+          <a:prstGeom prst="rect">
+            <a:avLst/>
+          </a:prstGeom>
+          <a:noFill/>
+        </p:spPr>
+        <p:txBody>
+          <a:bodyPr wrap="square">
+            <a:spAutoFit/>
+          </a:bodyPr>
+          <a:lstStyle/>
+          <a:p>
+            <a:r>
+              <a:rPr sz="2500">
+                <a:solidFill>
+                  <a:srgbClr val="A6E3A1"/>
+                </a:solidFill>
+              </a:rPr>
+              <a:t>• 本週驗證結果</a:t>
+            </a:r>
+          </a:p>
+        </p:txBody>
+      </p:sp>
+      <p:sp>
+        <p:nvSpPr>
+          <p:cNvPr id="5" name="TextBox 4"/>
+          <p:cNvSpPr txBox="1"/>
+          <p:nvPr/>
+        </p:nvSpPr>
+        <p:spPr>
+          <a:xfrm>
+            <a:off x="822959" y="1627632"/>
+            <a:ext cx="10789920" cy="502920"/>
+          </a:xfrm>
+          <a:prstGeom prst="rect">
+            <a:avLst/>
+          </a:prstGeom>
+          <a:noFill/>
+        </p:spPr>
+        <p:txBody>
+          <a:bodyPr wrap="square">
+            <a:spAutoFit/>
+          </a:bodyPr>
+          <a:lstStyle/>
+          <a:p>
+            <a:r>
               <a:rPr sz="2200">
                 <a:solidFill>
                   <a:srgbClr val="CDD6F4"/>
                 </a:solidFill>
               </a:rPr>
-              <a:t>    ─ Phase 4 探索：intra-workgroup 通訊移至 LDS（shared memory）</a:t>
+              <a:t>    ─ 768 邊 / 1536 頂點精確產生，Q1/Q2 正確歸零</a:t>
+            </a:r>
+          </a:p>
+        </p:txBody>
+      </p:sp>
+      <p:sp>
+        <p:nvSpPr>
+          <p:cNvPr id="6" name="TextBox 5"/>
+          <p:cNvSpPr txBox="1"/>
+          <p:nvPr/>
+        </p:nvSpPr>
+        <p:spPr>
+          <a:xfrm>
+            <a:off x="822959" y="2066544"/>
+            <a:ext cx="10789920" cy="502920"/>
+          </a:xfrm>
+          <a:prstGeom prst="rect">
+            <a:avLst/>
+          </a:prstGeom>
+          <a:noFill/>
+        </p:spPr>
+        <p:txBody>
+          <a:bodyPr wrap="square">
+            <a:spAutoFit/>
+          </a:bodyPr>
+          <a:lstStyle/>
+          <a:p>
+            <a:r>
+              <a:rPr sz="2000">
+                <a:solidFill>
+                  <a:srgbClr val="CDD6F4"/>
+                </a:solidFill>
+              </a:rPr>
+              <a:t>    ─ AMD RX 7900 XTX，耗時 ~2.76s（含 CPU 10ms polling 開銷）</a:t>
+            </a:r>
+          </a:p>
+        </p:txBody>
+      </p:sp>
+      <p:sp>
+        <p:nvSpPr>
+          <p:cNvPr id="7" name="TextBox 6"/>
+          <p:cNvSpPr txBox="1"/>
+          <p:nvPr/>
+        </p:nvSpPr>
+        <p:spPr>
+          <a:xfrm>
+            <a:off x="548640" y="2505456"/>
+            <a:ext cx="10789920" cy="502920"/>
+          </a:xfrm>
+          <a:prstGeom prst="rect">
+            <a:avLst/>
+          </a:prstGeom>
+          <a:noFill/>
+        </p:spPr>
+        <p:txBody>
+          <a:bodyPr wrap="square">
+            <a:spAutoFit/>
+          </a:bodyPr>
+          <a:lstStyle/>
+          <a:p>
+            <a:r>
+              <a:rPr sz="2500">
+                <a:solidFill>
+                  <a:srgbClr val="A6E3A1"/>
+                </a:solidFill>
+              </a:rPr>
+              <a:t>• 下週計畫</a:t>
+            </a:r>
+          </a:p>
+        </p:txBody>
+      </p:sp>
+      <p:sp>
+        <p:nvSpPr>
+          <p:cNvPr id="8" name="TextBox 7"/>
+          <p:cNvSpPr txBox="1"/>
+          <p:nvPr/>
+        </p:nvSpPr>
+        <p:spPr>
+          <a:xfrm>
+            <a:off x="822959" y="2944368"/>
+            <a:ext cx="10789920" cy="502920"/>
+          </a:xfrm>
+          <a:prstGeom prst="rect">
+            <a:avLst/>
+          </a:prstGeom>
+          <a:noFill/>
+        </p:spPr>
+        <p:txBody>
+          <a:bodyPr wrap="square">
+            <a:spAutoFit/>
+          </a:bodyPr>
+          <a:lstStyle/>
+          <a:p>
+            <a:r>
+              <a:rPr sz="2200">
+                <a:solidFill>
+                  <a:srgbClr val="CDD6F4"/>
+                </a:solidFill>
+              </a:rPr>
+              <a:t>    ─ 渲染管線：output vertex buffer → VK_PRIMITIVE_TOPOLOGY_LINE_LIST 顯示</a:t>
+            </a:r>
+          </a:p>
+        </p:txBody>
+      </p:sp>
+      <p:sp>
+        <p:nvSpPr>
+          <p:cNvPr id="9" name="TextBox 8"/>
+          <p:cNvSpPr txBox="1"/>
+          <p:nvPr/>
+        </p:nvSpPr>
+        <p:spPr>
+          <a:xfrm>
+            <a:off x="822959" y="3383280"/>
+            <a:ext cx="10789920" cy="502920"/>
+          </a:xfrm>
+          <a:prstGeom prst="rect">
+            <a:avLst/>
+          </a:prstGeom>
+          <a:noFill/>
+        </p:spPr>
+        <p:txBody>
+          <a:bodyPr wrap="square">
+            <a:spAutoFit/>
+          </a:bodyPr>
+          <a:lstStyle/>
+          <a:p>
+            <a:r>
+              <a:rPr sz="2200">
+                <a:solidFill>
+                  <a:srgbClr val="CDD6F4"/>
+                </a:solidFill>
+              </a:rPr>
+              <a:t>    ─ 性能量測：vkCmdWriteTimestamp 量化 GPU 純計算時間 + CAS 失敗率</a:t>
+            </a:r>
+          </a:p>
+        </p:txBody>
+      </p:sp>
+      <p:sp>
+        <p:nvSpPr>
+          <p:cNvPr id="10" name="TextBox 9"/>
+          <p:cNvSpPr txBox="1"/>
+          <p:nvPr/>
+        </p:nvSpPr>
+        <p:spPr>
+          <a:xfrm>
+            <a:off x="822959" y="3822192"/>
+            <a:ext cx="10789920" cy="502920"/>
+          </a:xfrm>
+          <a:prstGeom prst="rect">
+            <a:avLst/>
+          </a:prstGeom>
+          <a:noFill/>
+        </p:spPr>
+        <p:txBody>
+          <a:bodyPr wrap="square">
+            <a:spAutoFit/>
+          </a:bodyPr>
+          <a:lstStyle/>
+          <a:p>
+            <a:r>
+              <a:rPr sz="2200">
+                <a:solidFill>
+                  <a:srgbClr val="CDD6F4"/>
+                </a:solidFill>
+              </a:rPr>
+              <a:t>    ─ Phase 4 探索：用 LDS/local queue 驗證 global queue traffic 是否為主要瓶頸</a:t>
             </a:r>
           </a:p>
         </p:txBody>
